--- a/capstone/docs/qc-report.pptx
+++ b/capstone/docs/qc-report.pptx
@@ -21,7 +21,6 @@
     <p:sldId id="269" r:id="rId15"/>
     <p:sldId id="270" r:id="rId16"/>
     <p:sldId id="271" r:id="rId17"/>
-    <p:sldId id="272" r:id="rId18"/>
   </p:sldIdLst>
   <p:sldSz cx="9144000" cy="5143500" type="screen16x9"/>
   <p:notesSz cx="6858000" cy="9144000"/>
@@ -5076,140 +5075,6 @@
             <a:r>
               <a:rPr/>
               <a:t>, which the figure script writes from the pipeline artifacts.</a:t>
-            </a:r>
-          </a:p>
-        </p:txBody>
-      </p:sp>
-    </p:spTree>
-  </p:cSld>
-</p:sld>
-</file>
-
-<file path=ppt/slides/slide17.xml><?xml version="1.0" encoding="utf-8"?>
-<p:sld xmlns:a="http://schemas.openxmlformats.org/drawingml/2006/main" xmlns:r="http://schemas.openxmlformats.org/officeDocument/2006/relationships" xmlns:p="http://schemas.openxmlformats.org/presentationml/2006/main">
-  <p:cSld>
-    <p:spTree>
-      <p:nvGrpSpPr>
-        <p:cNvPr id="1" name=""/>
-        <p:cNvGrpSpPr/>
-        <p:nvPr/>
-      </p:nvGrpSpPr>
-      <p:grpSpPr>
-        <a:xfrm>
-          <a:off x="0" y="0"/>
-          <a:ext cx="0" cy="0"/>
-          <a:chOff x="0" y="0"/>
-          <a:chExt cx="0" cy="0"/>
-        </a:xfrm>
-      </p:grpSpPr>
-      <p:sp>
-        <p:nvSpPr>
-          <p:cNvPr id="2" name="Title 1"/>
-          <p:cNvSpPr>
-            <a:spLocks noGrp="1"/>
-          </p:cNvSpPr>
-          <p:nvPr>
-            <p:ph type="title"/>
-          </p:nvPr>
-        </p:nvSpPr>
-        <p:spPr/>
-        <p:txBody>
-          <a:bodyPr/>
-          <a:lstStyle/>
-          <a:p>
-            <a:pPr lvl="0" indent="0" marL="0">
-              <a:buNone/>
-            </a:pPr>
-            <a:r>
-              <a:rPr/>
-              <a:t>9. Key methods and their sources (in one line each)</a:t>
-            </a:r>
-          </a:p>
-        </p:txBody>
-      </p:sp>
-      <p:sp>
-        <p:nvSpPr>
-          <p:cNvPr id="3" name="Content Placeholder 2"/>
-          <p:cNvSpPr>
-            <a:spLocks noGrp="1"/>
-          </p:cNvSpPr>
-          <p:nvPr>
-            <p:ph idx="1"/>
-          </p:nvPr>
-        </p:nvSpPr>
-        <p:spPr/>
-        <p:txBody>
-          <a:bodyPr/>
-          <a:lstStyle/>
-          <a:p>
-            <a:pPr lvl="0" indent="-342900" marL="342900">
-              <a:buAutoNum type="arabicPeriod"/>
-            </a:pPr>
-            <a:r>
-              <a:rPr b="1"/>
-              <a:t>Sentence-BERT</a:t>
-            </a:r>
-            <a:r>
-              <a:rPr/>
-              <a:t> (Reimers &amp; Gurevych, 2019) - how to train transformer networks to produce high-quality sentence embeddings; the model family behind our 384-D vectors.</a:t>
-            </a:r>
-          </a:p>
-          <a:p>
-            <a:pPr lvl="0" indent="-342900" marL="342900">
-              <a:buAutoNum type="arabicPeriod"/>
-            </a:pPr>
-            <a:r>
-              <a:rPr b="1"/>
-              <a:t>UMAP</a:t>
-            </a:r>
-            <a:r>
-              <a:rPr/>
-              <a:t> (McInnes et al., 2018) - the dimensionality-reduction method used for the 2D projection.</a:t>
-            </a:r>
-          </a:p>
-          <a:p>
-            <a:pPr lvl="0" indent="-342900" marL="342900">
-              <a:buAutoNum type="arabicPeriod"/>
-            </a:pPr>
-            <a:r>
-              <a:rPr b="1"/>
-              <a:t>HDBSCAN</a:t>
-            </a:r>
-            <a:r>
-              <a:rPr/>
-              <a:t> (Campello et al., 2013) - the density-based clustering method used to group the corpus and mark noise.</a:t>
-            </a:r>
-          </a:p>
-          <a:p>
-            <a:pPr lvl="0" indent="-342900" marL="342900">
-              <a:buAutoNum type="arabicPeriod"/>
-            </a:pPr>
-            <a:r>
-              <a:rPr b="1"/>
-              <a:t>Isolation Forest</a:t>
-            </a:r>
-            <a:r>
-              <a:rPr/>
-              <a:t> (Liu, Ting &amp; Zhou, 2008) - the anomaly-detection method used to score unusual verbetes.</a:t>
-            </a:r>
-          </a:p>
-          <a:p>
-            <a:pPr lvl="0" indent="0" marL="0">
-              <a:buNone/>
-            </a:pPr>
-            <a:r>
-              <a:rPr/>
-              <a:t>You do not need to read these papers to follow this report; each is summarised above. Full citations appear in the technical report (</a:t>
-            </a:r>
-            <a:r>
-              <a:rPr>
-                <a:latin typeface="Courier"/>
-              </a:rPr>
-              <a:t>report.md</a:t>
-            </a:r>
-            <a:r>
-              <a:rPr/>
-              <a:t>).</a:t>
             </a:r>
           </a:p>
         </p:txBody>

--- a/capstone/docs/qc-report.pptx
+++ b/capstone/docs/qc-report.pptx
@@ -4660,7 +4660,7 @@
                       </a:pPr>
                       <a:r>
                         <a:rPr/>
-                        <a:t>art., res., para, decorrência, súmula</a:t>
+                        <a:t>trabalho, súmula, decorrência, cancelada, empregado</a:t>
                       </a:r>
                     </a:p>
                   </a:txBody>
@@ -4707,7 +4707,7 @@
                       </a:pPr>
                       <a:r>
                         <a:rPr/>
-                        <a:t>concede, homologação, res., sessão</a:t>
+                        <a:t>concede, homologação, sessão, empregado</a:t>
                       </a:r>
                     </a:p>
                   </a:txBody>
